--- a/ppt/IoT23-MicropythonBT.pptx
+++ b/ppt/IoT23-MicropythonBT.pptx
@@ -5354,7 +5354,7 @@
             </a:r>
             <a:r>
               <a:rPr lang="fr-FR" dirty="0" err="1"/>
-              <a:t>characeristics</a:t>
+              <a:t>characteristics</a:t>
             </a:r>
             <a:r>
               <a:rPr lang="fr-FR" dirty="0"/>
